--- a/Bentley Ottmann.pptx
+++ b/Bentley Ottmann.pptx
@@ -15844,6 +15844,182 @@
           </p:sp>
         </mc:Fallback>
       </mc:AlternateContent>
+      <p:pic>
+        <p:nvPicPr>
+          <p:cNvPr id="3" name="Grafik 2">
+            <a:extLst>
+              <a:ext uri="{FF2B5EF4-FFF2-40B4-BE49-F238E27FC236}">
+                <a16:creationId xmlns:a16="http://schemas.microsoft.com/office/drawing/2014/main" id="{84808BF6-802E-4FFF-BD2F-6EF62EDD2257}"/>
+              </a:ext>
+            </a:extLst>
+          </p:cNvPr>
+          <p:cNvPicPr>
+            <a:picLocks noChangeAspect="1"/>
+          </p:cNvPicPr>
+          <p:nvPr/>
+        </p:nvPicPr>
+        <p:blipFill>
+          <a:blip r:embed="rId4" cstate="print">
+            <a:extLst>
+              <a:ext uri="{BEBA8EAE-BF5A-486C-A8C5-ECC9F3942E4B}">
+                <a14:imgProps xmlns:a14="http://schemas.microsoft.com/office/drawing/2010/main">
+                  <a14:imgLayer r:embed="rId5">
+                    <a14:imgEffect>
+                      <a14:backgroundRemoval t="3315" b="99724" l="763" r="99584">
+                        <a14:foregroundMark x1="27601" y1="8978" x2="29750" y2="25967"/>
+                        <a14:foregroundMark x1="29750" y1="25967" x2="30583" y2="27901"/>
+                        <a14:foregroundMark x1="27393" y1="5110" x2="35576" y2="26934"/>
+                        <a14:foregroundMark x1="35576" y1="26934" x2="38350" y2="52210"/>
+                        <a14:foregroundMark x1="38350" y1="52210" x2="31484" y2="56768"/>
+                        <a14:foregroundMark x1="23370" y1="0" x2="23725" y2="17812"/>
+                        <a14:foregroundMark x1="17523" y1="31344" x2="15950" y2="33978"/>
+                        <a14:foregroundMark x1="18639" y1="29475" x2="17975" y2="30586"/>
+                        <a14:foregroundMark x1="22874" y1="22383" x2="21743" y2="24277"/>
+                        <a14:foregroundMark x1="15950" y1="33978" x2="1179" y2="33978"/>
+                        <a14:foregroundMark x1="832" y1="34807" x2="1456" y2="97099"/>
+                        <a14:foregroundMark x1="1595" y1="98895" x2="21359" y2="96271"/>
+                        <a14:foregroundMark x1="21359" y1="96271" x2="40638" y2="81906"/>
+                        <a14:foregroundMark x1="40638" y1="81906" x2="39459" y2="47238"/>
+                        <a14:foregroundMark x1="39459" y1="47238" x2="39945" y2="42956"/>
+                        <a14:foregroundMark x1="38904" y1="43508" x2="25867" y2="58011"/>
+                        <a14:foregroundMark x1="25867" y1="58011" x2="13800" y2="49033"/>
+                        <a14:foregroundMark x1="13800" y1="49033" x2="29542" y2="34254"/>
+                        <a14:foregroundMark x1="46463" y1="49309" x2="22746" y2="62431"/>
+                        <a14:foregroundMark x1="22746" y1="62431" x2="43412" y2="54144"/>
+                        <a14:foregroundMark x1="47642" y1="60635" x2="26768" y2="70856"/>
+                        <a14:foregroundMark x1="26768" y1="70856" x2="43759" y2="78591"/>
+                        <a14:foregroundMark x1="43759" y1="78591" x2="71775" y2="74171"/>
+                        <a14:foregroundMark x1="84327" y1="58287" x2="67129" y2="55249"/>
+                        <a14:foregroundMark x1="67129" y1="55249" x2="66227" y2="35497"/>
+                        <a14:foregroundMark x1="66227" y1="35497" x2="61234" y2="36326"/>
+                        <a14:foregroundMark x1="69556" y1="18646" x2="58252" y2="34945"/>
+                        <a14:foregroundMark x1="58252" y1="34945" x2="68932" y2="33011"/>
+                        <a14:foregroundMark x1="68932" y1="33011" x2="49584" y2="22238"/>
+                        <a14:foregroundMark x1="49584" y1="22238" x2="49584" y2="22238"/>
+                        <a14:foregroundMark x1="63315" y1="9945" x2="53398" y2="21133"/>
+                        <a14:foregroundMark x1="53398" y1="21133" x2="60749" y2="23066"/>
+                        <a14:foregroundMark x1="35090" y1="10497" x2="46949" y2="14227"/>
+                        <a14:foregroundMark x1="46949" y1="14227" x2="37864" y2="8149"/>
+                        <a14:foregroundMark x1="37864" y1="8149" x2="47642" y2="7873"/>
+                        <a14:foregroundMark x1="47642" y1="7873" x2="40985" y2="22928"/>
+                        <a14:foregroundMark x1="40985" y1="22928" x2="54438" y2="29972"/>
+                        <a14:foregroundMark x1="80374" y1="21271" x2="66644" y2="13812"/>
+                        <a14:foregroundMark x1="66644" y1="13812" x2="74272" y2="27210"/>
+                        <a14:foregroundMark x1="74272" y1="27210" x2="87101" y2="16989"/>
+                        <a14:foregroundMark x1="87101" y1="16989" x2="82732" y2="73066"/>
+                        <a14:foregroundMark x1="82732" y1="73066" x2="94452" y2="82044"/>
+                        <a14:foregroundMark x1="94452" y1="82044" x2="97434" y2="70580"/>
+                        <a14:foregroundMark x1="95770" y1="41436" x2="90777" y2="28867"/>
+                        <a14:foregroundMark x1="90777" y1="28867" x2="89112" y2="65746"/>
+                        <a14:foregroundMark x1="89112" y1="65746" x2="92164" y2="31492"/>
+                        <a14:foregroundMark x1="92164" y1="31492" x2="93689" y2="60635"/>
+                        <a14:foregroundMark x1="97157" y1="12569" x2="99584" y2="28177"/>
+                        <a14:foregroundMark x1="97157" y1="7459" x2="68031" y2="7735"/>
+                        <a14:foregroundMark x1="96879" y1="12845" x2="70527" y2="9254"/>
+                        <a14:foregroundMark x1="70527" y1="9254" x2="84535" y2="12155"/>
+                        <a14:foregroundMark x1="84535" y1="12155" x2="59293" y2="3453"/>
+                        <a14:foregroundMark x1="59293" y1="3453" x2="54577" y2="5110"/>
+                        <a14:foregroundMark x1="60472" y1="6354" x2="58946" y2="11740"/>
+                        <a14:foregroundMark x1="56865" y1="12293" x2="55201" y2="13260"/>
+                        <a14:foregroundMark x1="56588" y1="40608" x2="54577" y2="60359"/>
+                        <a14:foregroundMark x1="54577" y1="60359" x2="58807" y2="35083"/>
+                        <a14:foregroundMark x1="58807" y1="35083" x2="58044" y2="34254"/>
+                        <a14:foregroundMark x1="64078" y1="53177" x2="53259" y2="51934"/>
+                        <a14:foregroundMark x1="53259" y1="51934" x2="42857" y2="40470"/>
+                        <a14:foregroundMark x1="42857" y1="40470" x2="44175" y2="47238"/>
+                        <a14:foregroundMark x1="55964" y1="48343" x2="58391" y2="69475"/>
+                        <a14:foregroundMark x1="66366" y1="80525" x2="16921" y2="76243"/>
+                        <a14:foregroundMark x1="16921" y1="76243" x2="22746" y2="79006"/>
+                        <a14:foregroundMark x1="45562" y1="82044" x2="25589" y2="80249"/>
+                        <a14:foregroundMark x1="25589" y1="80249" x2="11859" y2="55663"/>
+                        <a14:foregroundMark x1="11859" y1="55663" x2="20804" y2="58287"/>
+                        <a14:foregroundMark x1="20804" y1="58287" x2="20319" y2="57459"/>
+                        <a14:foregroundMark x1="13245" y1="45304" x2="14008" y2="44475"/>
+                        <a14:foregroundMark x1="8738" y1="67680" x2="10818" y2="85912"/>
+                        <a14:foregroundMark x1="38280" y1="87155" x2="58530" y2="94890"/>
+                        <a14:foregroundMark x1="58530" y1="94890" x2="59154" y2="91298"/>
+                        <a14:foregroundMark x1="84466" y1="90193" x2="75035" y2="94061"/>
+                        <a14:foregroundMark x1="75035" y1="94061" x2="75589" y2="89227"/>
+                        <a14:foregroundMark x1="94105" y1="86188" x2="80374" y2="94337"/>
+                        <a14:foregroundMark x1="80374" y1="94337" x2="68724" y2="93923"/>
+                        <a14:foregroundMark x1="68724" y1="93923" x2="77878" y2="87293"/>
+                        <a14:foregroundMark x1="77878" y1="87293" x2="64840" y2="99724"/>
+                        <a14:foregroundMark x1="64840" y1="99724" x2="64840" y2="99724"/>
+                        <a14:foregroundMark x1="81900" y1="71547" x2="81761" y2="73619"/>
+                        <a14:foregroundMark x1="80583" y1="36326" x2="76006" y2="50552"/>
+                        <a14:foregroundMark x1="76006" y1="50552" x2="70319" y2="39917"/>
+                        <a14:foregroundMark x1="25035" y1="20166" x2="26976" y2="25829"/>
+                        <a14:foregroundMark x1="26976" y1="27348" x2="26214" y2="29696"/>
+                        <a14:foregroundMark x1="25312" y1="29972" x2="20319" y2="31906"/>
+                        <a14:backgroundMark x1="2358" y1="24309" x2="6449" y2="26105"/>
+                        <a14:backgroundMark x1="1456" y1="29144" x2="11789" y2="28177"/>
+                        <a14:backgroundMark x1="11789" y1="28177" x2="10541" y2="27624"/>
+                        <a14:backgroundMark x1="16990" y1="27072" x2="22122" y2="26105"/>
+                        <a14:backgroundMark x1="21983" y1="27901" x2="16852" y2="27348"/>
+                        <a14:backgroundMark x1="17476" y1="27348" x2="18239" y2="27624"/>
+                        <a14:backgroundMark x1="17614" y1="29420" x2="15049" y2="29144"/>
+                        <a14:backgroundMark x1="22607" y1="24309" x2="22746" y2="17956"/>
+                        <a14:backgroundMark x1="22885" y1="18370" x2="23509" y2="21961"/>
+                      </a14:backgroundRemoval>
+                    </a14:imgEffect>
+                  </a14:imgLayer>
+                </a14:imgProps>
+              </a:ext>
+              <a:ext uri="{28A0092B-C50C-407E-A947-70E740481C1C}">
+                <a14:useLocalDpi xmlns:a14="http://schemas.microsoft.com/office/drawing/2010/main" val="0"/>
+              </a:ext>
+            </a:extLst>
+          </a:blip>
+          <a:stretch>
+            <a:fillRect/>
+          </a:stretch>
+        </p:blipFill>
+        <p:spPr>
+          <a:xfrm>
+            <a:off x="119336" y="3140968"/>
+            <a:ext cx="5181230" cy="2601395"/>
+          </a:xfrm>
+          <a:prstGeom prst="rect">
+            <a:avLst/>
+          </a:prstGeom>
+        </p:spPr>
+      </p:pic>
+      <p:pic>
+        <p:nvPicPr>
+          <p:cNvPr id="5" name="Grafik 4">
+            <a:extLst>
+              <a:ext uri="{FF2B5EF4-FFF2-40B4-BE49-F238E27FC236}">
+                <a16:creationId xmlns:a16="http://schemas.microsoft.com/office/drawing/2014/main" id="{ADCED948-EFE2-4F87-8607-9E516C395EDF}"/>
+              </a:ext>
+            </a:extLst>
+          </p:cNvPr>
+          <p:cNvPicPr>
+            <a:picLocks noChangeAspect="1"/>
+          </p:cNvPicPr>
+          <p:nvPr/>
+        </p:nvPicPr>
+        <p:blipFill>
+          <a:blip r:embed="rId6">
+            <a:extLst>
+              <a:ext uri="{28A0092B-C50C-407E-A947-70E740481C1C}">
+                <a14:useLocalDpi xmlns:a14="http://schemas.microsoft.com/office/drawing/2010/main" val="0"/>
+              </a:ext>
+            </a:extLst>
+          </a:blip>
+          <a:stretch>
+            <a:fillRect/>
+          </a:stretch>
+        </p:blipFill>
+        <p:spPr>
+          <a:xfrm>
+            <a:off x="6888088" y="3240208"/>
+            <a:ext cx="2702529" cy="2402914"/>
+          </a:xfrm>
+          <a:prstGeom prst="rect">
+            <a:avLst/>
+          </a:prstGeom>
+        </p:spPr>
+      </p:pic>
     </p:spTree>
     <p:extLst>
       <p:ext uri="{BB962C8B-B14F-4D97-AF65-F5344CB8AC3E}">
@@ -15927,54 +16103,6 @@
       </p:sp>
       <p:sp>
         <p:nvSpPr>
-          <p:cNvPr id="87" name="PlaceHolder 2"/>
-          <p:cNvSpPr>
-            <a:spLocks noGrp="1"/>
-          </p:cNvSpPr>
-          <p:nvPr>
-            <p:ph/>
-          </p:nvPr>
-        </p:nvSpPr>
-        <p:spPr bwMode="auto">
-          <a:xfrm>
-            <a:off x="407368" y="1556792"/>
-            <a:ext cx="11449272" cy="4536504"/>
-          </a:xfrm>
-          <a:prstGeom prst="rect">
-            <a:avLst/>
-          </a:prstGeom>
-          <a:noFill/>
-          <a:ln w="0">
-            <a:noFill/>
-          </a:ln>
-        </p:spPr>
-        <p:txBody>
-          <a:bodyPr lIns="91440" tIns="45720" rIns="91440" bIns="45720" anchor="t">
-            <a:noAutofit/>
-          </a:bodyPr>
-          <a:lstStyle/>
-          <a:p>
-            <a:pPr indent="0" algn="ctr" defTabSz="457200">
-              <a:lnSpc>
-                <a:spcPct val="100000"/>
-              </a:lnSpc>
-              <a:buNone/>
-              <a:tabLst>
-                <a:tab pos="0" algn="l"/>
-              </a:tabLst>
-              <a:defRPr/>
-            </a:pPr>
-            <a:endParaRPr lang="en-US" sz="1500" b="0" u="none" strike="noStrike" dirty="0">
-              <a:solidFill>
-                <a:srgbClr val="000000"/>
-              </a:solidFill>
-              <a:latin typeface="Arial"/>
-            </a:endParaRPr>
-          </a:p>
-        </p:txBody>
-      </p:sp>
-      <p:sp>
-        <p:nvSpPr>
           <p:cNvPr id="88" name="PlaceHolder 3"/>
           <p:cNvSpPr>
             <a:spLocks noGrp="1"/>
@@ -16119,6 +16247,516 @@
           </a:p>
         </p:txBody>
       </p:sp>
+      <p:sp>
+        <p:nvSpPr>
+          <p:cNvPr id="6" name="PlaceHolder 2">
+            <a:extLst>
+              <a:ext uri="{FF2B5EF4-FFF2-40B4-BE49-F238E27FC236}">
+                <a16:creationId xmlns:a16="http://schemas.microsoft.com/office/drawing/2014/main" id="{A0046666-E53E-4FC5-9CF9-B72689068340}"/>
+              </a:ext>
+            </a:extLst>
+          </p:cNvPr>
+          <p:cNvSpPr txBox="1">
+            <a:spLocks/>
+          </p:cNvSpPr>
+          <p:nvPr/>
+        </p:nvSpPr>
+        <p:spPr bwMode="auto">
+          <a:xfrm>
+            <a:off x="4471401" y="3491520"/>
+            <a:ext cx="3370764" cy="1393970"/>
+          </a:xfrm>
+          <a:prstGeom prst="rect">
+            <a:avLst/>
+          </a:prstGeom>
+          <a:noFill/>
+          <a:ln w="0">
+            <a:noFill/>
+          </a:ln>
+        </p:spPr>
+        <p:txBody>
+          <a:bodyPr lIns="91440" tIns="45720" rIns="91440" bIns="45720" anchor="t">
+            <a:noAutofit/>
+          </a:bodyPr>
+          <a:lstStyle>
+            <a:lvl1pPr indent="0" algn="l" defTabSz="914400" rtl="0" eaLnBrk="1" latinLnBrk="0" hangingPunct="1">
+              <a:lnSpc>
+                <a:spcPct val="90000"/>
+              </a:lnSpc>
+              <a:spcBef>
+                <a:spcPct val="0"/>
+              </a:spcBef>
+              <a:buNone/>
+              <a:tabLst>
+                <a:tab pos="0" algn="l"/>
+              </a:tabLst>
+              <a:defRPr lang="de-DE" sz="4400" b="0" u="none" strike="noStrike" kern="1200">
+                <a:solidFill>
+                  <a:schemeClr val="dk1"/>
+                </a:solidFill>
+                <a:latin typeface="Calibri Light"/>
+                <a:ea typeface="+mj-ea"/>
+                <a:cs typeface="+mj-cs"/>
+              </a:defRPr>
+            </a:lvl1pPr>
+          </a:lstStyle>
+          <a:p>
+            <a:pPr algn="ctr" defTabSz="457200">
+              <a:lnSpc>
+                <a:spcPct val="100000"/>
+              </a:lnSpc>
+              <a:defRPr/>
+            </a:pPr>
+            <a:r>
+              <a:rPr lang="en-US" sz="2500">
+                <a:solidFill>
+                  <a:srgbClr val="000000"/>
+                </a:solidFill>
+                <a:latin typeface="+mj-lt"/>
+              </a:rPr>
+              <a:t>Entscheidungsproblem</a:t>
+            </a:r>
+          </a:p>
+          <a:p>
+            <a:pPr algn="ctr" defTabSz="457200">
+              <a:lnSpc>
+                <a:spcPct val="100000"/>
+              </a:lnSpc>
+              <a:defRPr/>
+            </a:pPr>
+            <a:r>
+              <a:rPr lang="en-US" sz="2500">
+                <a:solidFill>
+                  <a:srgbClr val="000000"/>
+                </a:solidFill>
+                <a:latin typeface="+mj-lt"/>
+              </a:rPr>
+              <a:t>Reporting-Problem</a:t>
+            </a:r>
+          </a:p>
+          <a:p>
+            <a:pPr algn="ctr" defTabSz="457200">
+              <a:lnSpc>
+                <a:spcPct val="100000"/>
+              </a:lnSpc>
+              <a:defRPr/>
+            </a:pPr>
+            <a:r>
+              <a:rPr lang="en-US" sz="2500">
+                <a:solidFill>
+                  <a:srgbClr val="000000"/>
+                </a:solidFill>
+                <a:latin typeface="+mj-lt"/>
+              </a:rPr>
+              <a:t>Counting-Problem </a:t>
+            </a:r>
+            <a:endParaRPr lang="en-US" sz="2500" dirty="0">
+              <a:solidFill>
+                <a:srgbClr val="000000"/>
+              </a:solidFill>
+              <a:latin typeface="+mj-lt"/>
+            </a:endParaRPr>
+          </a:p>
+        </p:txBody>
+      </p:sp>
+      <mc:AlternateContent xmlns:mc="http://schemas.openxmlformats.org/markup-compatibility/2006">
+        <mc:Choice xmlns:a14="http://schemas.microsoft.com/office/drawing/2010/main" Requires="a14">
+          <p:sp>
+            <p:nvSpPr>
+              <p:cNvPr id="7" name="PlaceHolder 2">
+                <a:extLst>
+                  <a:ext uri="{FF2B5EF4-FFF2-40B4-BE49-F238E27FC236}">
+                    <a16:creationId xmlns:a16="http://schemas.microsoft.com/office/drawing/2014/main" id="{A66DF7E8-ECE4-4CB7-B491-5AB688BC8985}"/>
+                  </a:ext>
+                </a:extLst>
+              </p:cNvPr>
+              <p:cNvSpPr txBox="1">
+                <a:spLocks/>
+              </p:cNvSpPr>
+              <p:nvPr/>
+            </p:nvSpPr>
+            <p:spPr bwMode="auto">
+              <a:xfrm>
+                <a:off x="2639616" y="2699432"/>
+                <a:ext cx="7439157" cy="648072"/>
+              </a:xfrm>
+              <a:prstGeom prst="rect">
+                <a:avLst/>
+              </a:prstGeom>
+              <a:noFill/>
+              <a:ln w="0">
+                <a:noFill/>
+              </a:ln>
+            </p:spPr>
+            <p:txBody>
+              <a:bodyPr lIns="91440" tIns="45720" rIns="91440" bIns="45720" anchor="t">
+                <a:noAutofit/>
+              </a:bodyPr>
+              <a:lstStyle>
+                <a:lvl1pPr indent="0" algn="l" defTabSz="914400" rtl="0" eaLnBrk="1" latinLnBrk="0" hangingPunct="1">
+                  <a:lnSpc>
+                    <a:spcPct val="90000"/>
+                  </a:lnSpc>
+                  <a:spcBef>
+                    <a:spcPct val="0"/>
+                  </a:spcBef>
+                  <a:buNone/>
+                  <a:tabLst>
+                    <a:tab pos="0" algn="l"/>
+                  </a:tabLst>
+                  <a:defRPr lang="de-DE" sz="4400" b="0" u="none" strike="noStrike" kern="1200">
+                    <a:solidFill>
+                      <a:schemeClr val="dk1"/>
+                    </a:solidFill>
+                    <a:latin typeface="Calibri Light"/>
+                    <a:ea typeface="+mj-ea"/>
+                    <a:cs typeface="+mj-cs"/>
+                  </a:defRPr>
+                </a:lvl1pPr>
+              </a:lstStyle>
+              <a:p>
+                <a:pPr algn="ctr" defTabSz="457200">
+                  <a:lnSpc>
+                    <a:spcPct val="100000"/>
+                  </a:lnSpc>
+                  <a:defRPr/>
+                </a:pPr>
+                <a14:m>
+                  <m:oMath xmlns:m="http://schemas.openxmlformats.org/officeDocument/2006/math">
+                    <m:sSub>
+                      <m:sSubPr>
+                        <m:ctrlPr>
+                          <a:rPr lang="de-DE" sz="2800" smtClean="0">
+                            <a:solidFill>
+                              <a:srgbClr val="836967"/>
+                            </a:solidFill>
+                            <a:latin typeface="Cambria Math" panose="02040503050406030204" pitchFamily="18" charset="0"/>
+                          </a:rPr>
+                        </m:ctrlPr>
+                      </m:sSubPr>
+                      <m:e>
+                        <m:r>
+                          <a:rPr lang="de-DE" sz="2800" i="1">
+                            <a:latin typeface="Cambria Math" panose="02040503050406030204" pitchFamily="18" charset="0"/>
+                          </a:rPr>
+                          <m:t>𝑆</m:t>
+                        </m:r>
+                      </m:e>
+                      <m:sub>
+                        <m:r>
+                          <a:rPr lang="de-DE" sz="2800" i="1">
+                            <a:latin typeface="Cambria Math" panose="02040503050406030204" pitchFamily="18" charset="0"/>
+                          </a:rPr>
+                          <m:t>𝑖</m:t>
+                        </m:r>
+                      </m:sub>
+                    </m:sSub>
+                    <m:r>
+                      <a:rPr lang="de-DE" sz="2800" i="0">
+                        <a:latin typeface="Cambria Math" panose="02040503050406030204" pitchFamily="18" charset="0"/>
+                      </a:rPr>
+                      <m:t>=</m:t>
+                    </m:r>
+                    <m:d>
+                      <m:dPr>
+                        <m:begChr m:val="{"/>
+                        <m:endChr m:val="}"/>
+                        <m:ctrlPr>
+                          <a:rPr lang="de-DE" sz="2800" i="1">
+                            <a:solidFill>
+                              <a:srgbClr val="836967"/>
+                            </a:solidFill>
+                            <a:latin typeface="Cambria Math" panose="02040503050406030204" pitchFamily="18" charset="0"/>
+                          </a:rPr>
+                        </m:ctrlPr>
+                      </m:dPr>
+                      <m:e>
+                        <m:sSub>
+                          <m:sSubPr>
+                            <m:ctrlPr>
+                              <a:rPr lang="de-DE" sz="2800" i="1">
+                                <a:solidFill>
+                                  <a:srgbClr val="836967"/>
+                                </a:solidFill>
+                                <a:latin typeface="Cambria Math" panose="02040503050406030204" pitchFamily="18" charset="0"/>
+                              </a:rPr>
+                            </m:ctrlPr>
+                          </m:sSubPr>
+                          <m:e>
+                            <m:r>
+                              <a:rPr lang="de-DE" sz="2800" i="1">
+                                <a:latin typeface="Cambria Math" panose="02040503050406030204" pitchFamily="18" charset="0"/>
+                              </a:rPr>
+                              <m:t>𝑃</m:t>
+                            </m:r>
+                          </m:e>
+                          <m:sub>
+                            <m:r>
+                              <a:rPr lang="de-DE" sz="2800" i="1">
+                                <a:latin typeface="Cambria Math" panose="02040503050406030204" pitchFamily="18" charset="0"/>
+                              </a:rPr>
+                              <m:t>𝑖</m:t>
+                            </m:r>
+                          </m:sub>
+                        </m:sSub>
+                        <m:r>
+                          <a:rPr lang="de-DE" sz="2800" i="0">
+                            <a:latin typeface="Cambria Math" panose="02040503050406030204" pitchFamily="18" charset="0"/>
+                          </a:rPr>
+                          <m:t>+</m:t>
+                        </m:r>
+                        <m:r>
+                          <a:rPr lang="de-DE" sz="2800" i="1">
+                            <a:latin typeface="Cambria Math" panose="02040503050406030204" pitchFamily="18" charset="0"/>
+                          </a:rPr>
+                          <m:t>𝜆</m:t>
+                        </m:r>
+                        <m:d>
+                          <m:dPr>
+                            <m:begChr m:val=""/>
+                            <m:endChr m:val="|"/>
+                            <m:ctrlPr>
+                              <a:rPr lang="de-DE" sz="2800" i="1">
+                                <a:solidFill>
+                                  <a:srgbClr val="836967"/>
+                                </a:solidFill>
+                                <a:latin typeface="Cambria Math" panose="02040503050406030204" pitchFamily="18" charset="0"/>
+                              </a:rPr>
+                            </m:ctrlPr>
+                          </m:dPr>
+                          <m:e>
+                            <m:d>
+                              <m:dPr>
+                                <m:ctrlPr>
+                                  <a:rPr lang="de-DE" sz="2800" i="1">
+                                    <a:solidFill>
+                                      <a:srgbClr val="836967"/>
+                                    </a:solidFill>
+                                    <a:latin typeface="Cambria Math" panose="02040503050406030204" pitchFamily="18" charset="0"/>
+                                  </a:rPr>
+                                </m:ctrlPr>
+                              </m:dPr>
+                              <m:e>
+                                <m:sSub>
+                                  <m:sSubPr>
+                                    <m:ctrlPr>
+                                      <a:rPr lang="de-DE" sz="2800" i="1">
+                                        <a:solidFill>
+                                          <a:srgbClr val="836967"/>
+                                        </a:solidFill>
+                                        <a:latin typeface="Cambria Math" panose="02040503050406030204" pitchFamily="18" charset="0"/>
+                                      </a:rPr>
+                                    </m:ctrlPr>
+                                  </m:sSubPr>
+                                  <m:e>
+                                    <m:r>
+                                      <a:rPr lang="de-DE" sz="2800" i="1">
+                                        <a:latin typeface="Cambria Math" panose="02040503050406030204" pitchFamily="18" charset="0"/>
+                                      </a:rPr>
+                                      <m:t>𝑄</m:t>
+                                    </m:r>
+                                  </m:e>
+                                  <m:sub>
+                                    <m:r>
+                                      <a:rPr lang="de-DE" sz="2800" i="1">
+                                        <a:latin typeface="Cambria Math" panose="02040503050406030204" pitchFamily="18" charset="0"/>
+                                      </a:rPr>
+                                      <m:t>𝑖</m:t>
+                                    </m:r>
+                                  </m:sub>
+                                </m:sSub>
+                                <m:r>
+                                  <a:rPr lang="de-DE" sz="2800" i="0">
+                                    <a:latin typeface="Cambria Math" panose="02040503050406030204" pitchFamily="18" charset="0"/>
+                                  </a:rPr>
+                                  <m:t>−</m:t>
+                                </m:r>
+                                <m:sSub>
+                                  <m:sSubPr>
+                                    <m:ctrlPr>
+                                      <a:rPr lang="de-DE" sz="2800" i="1">
+                                        <a:solidFill>
+                                          <a:srgbClr val="836967"/>
+                                        </a:solidFill>
+                                        <a:latin typeface="Cambria Math" panose="02040503050406030204" pitchFamily="18" charset="0"/>
+                                      </a:rPr>
+                                    </m:ctrlPr>
+                                  </m:sSubPr>
+                                  <m:e>
+                                    <m:r>
+                                      <a:rPr lang="de-DE" sz="2800" i="1">
+                                        <a:latin typeface="Cambria Math" panose="02040503050406030204" pitchFamily="18" charset="0"/>
+                                      </a:rPr>
+                                      <m:t>𝑃</m:t>
+                                    </m:r>
+                                  </m:e>
+                                  <m:sub>
+                                    <m:r>
+                                      <a:rPr lang="de-DE" sz="2800" i="1">
+                                        <a:latin typeface="Cambria Math" panose="02040503050406030204" pitchFamily="18" charset="0"/>
+                                      </a:rPr>
+                                      <m:t>𝑖</m:t>
+                                    </m:r>
+                                  </m:sub>
+                                </m:sSub>
+                              </m:e>
+                            </m:d>
+                          </m:e>
+                        </m:d>
+                        <m:r>
+                          <a:rPr lang="de-DE" sz="2800" i="0">
+                            <a:latin typeface="Cambria Math" panose="02040503050406030204" pitchFamily="18" charset="0"/>
+                          </a:rPr>
+                          <m:t>0≤</m:t>
+                        </m:r>
+                        <m:r>
+                          <a:rPr lang="de-DE" sz="2800" i="1">
+                            <a:latin typeface="Cambria Math" panose="02040503050406030204" pitchFamily="18" charset="0"/>
+                          </a:rPr>
+                          <m:t>𝜆</m:t>
+                        </m:r>
+                        <m:r>
+                          <a:rPr lang="de-DE" sz="2800" i="0">
+                            <a:latin typeface="Cambria Math" panose="02040503050406030204" pitchFamily="18" charset="0"/>
+                          </a:rPr>
+                          <m:t>≤1</m:t>
+                        </m:r>
+                      </m:e>
+                    </m:d>
+                    <m:r>
+                      <m:rPr>
+                        <m:nor/>
+                      </m:rPr>
+                      <a:rPr lang="de-DE" sz="2800"/>
+                      <m:t>​</m:t>
+                    </m:r>
+                  </m:oMath>
+                </a14:m>
+                <a:r>
+                  <a:rPr lang="en-US" sz="2500" dirty="0">
+                    <a:solidFill>
+                      <a:srgbClr val="000000"/>
+                    </a:solidFill>
+                    <a:latin typeface="+mj-lt"/>
+                  </a:rPr>
+                  <a:t> </a:t>
+                </a:r>
+                <a:r>
+                  <a:rPr lang="en-US" sz="2500" dirty="0" err="1">
+                    <a:solidFill>
+                      <a:srgbClr val="000000"/>
+                    </a:solidFill>
+                    <a:latin typeface="+mj-lt"/>
+                  </a:rPr>
+                  <a:t>mit</a:t>
+                </a:r>
+                <a:r>
+                  <a:rPr lang="en-US" sz="2500" dirty="0">
+                    <a:solidFill>
+                      <a:srgbClr val="000000"/>
+                    </a:solidFill>
+                    <a:latin typeface="+mj-lt"/>
+                  </a:rPr>
+                  <a:t> </a:t>
+                </a:r>
+                <a14:m>
+                  <m:oMath xmlns:m="http://schemas.openxmlformats.org/officeDocument/2006/math">
+                    <m:r>
+                      <a:rPr lang="en-US" sz="2500" dirty="0" smtClean="0">
+                        <a:solidFill>
+                          <a:srgbClr val="000000"/>
+                        </a:solidFill>
+                        <a:latin typeface="Cambria Math" panose="02040503050406030204" pitchFamily="18" charset="0"/>
+                      </a:rPr>
+                      <m:t>ⅈ</m:t>
+                    </m:r>
+                    <m:r>
+                      <a:rPr lang="en-US" sz="2500" i="0" dirty="0">
+                        <a:solidFill>
+                          <a:srgbClr val="000000"/>
+                        </a:solidFill>
+                        <a:latin typeface="Cambria Math" panose="02040503050406030204" pitchFamily="18" charset="0"/>
+                      </a:rPr>
+                      <m:t>∈</m:t>
+                    </m:r>
+                    <m:r>
+                      <a:rPr lang="en-US" sz="2500" i="0" dirty="0">
+                        <a:solidFill>
+                          <a:srgbClr val="000000"/>
+                        </a:solidFill>
+                        <a:latin typeface="Cambria Math" panose="02040503050406030204" pitchFamily="18" charset="0"/>
+                      </a:rPr>
+                      <m:t>ℕ</m:t>
+                    </m:r>
+                    <m:r>
+                      <a:rPr lang="en-US" sz="2500" i="0" dirty="0">
+                        <a:solidFill>
+                          <a:srgbClr val="000000"/>
+                        </a:solidFill>
+                        <a:latin typeface="Cambria Math" panose="02040503050406030204" pitchFamily="18" charset="0"/>
+                      </a:rPr>
+                      <m:t>∧ⅈ&gt;0</m:t>
+                    </m:r>
+                  </m:oMath>
+                </a14:m>
+                <a:endParaRPr lang="en-US" sz="2500" dirty="0">
+                  <a:solidFill>
+                    <a:srgbClr val="000000"/>
+                  </a:solidFill>
+                  <a:latin typeface="+mj-lt"/>
+                </a:endParaRPr>
+              </a:p>
+            </p:txBody>
+          </p:sp>
+        </mc:Choice>
+        <mc:Fallback>
+          <p:sp>
+            <p:nvSpPr>
+              <p:cNvPr id="7" name="PlaceHolder 2">
+                <a:extLst>
+                  <a:ext uri="{FF2B5EF4-FFF2-40B4-BE49-F238E27FC236}">
+                    <a16:creationId xmlns:a16="http://schemas.microsoft.com/office/drawing/2014/main" id="{A66DF7E8-ECE4-4CB7-B491-5AB688BC8985}"/>
+                  </a:ext>
+                </a:extLst>
+              </p:cNvPr>
+              <p:cNvSpPr txBox="1">
+                <a:spLocks noRot="1" noChangeAspect="1" noMove="1" noResize="1" noEditPoints="1" noAdjustHandles="1" noChangeArrowheads="1" noChangeShapeType="1" noTextEdit="1"/>
+              </p:cNvSpPr>
+              <p:nvPr/>
+            </p:nvSpPr>
+            <p:spPr bwMode="auto">
+              <a:xfrm>
+                <a:off x="2639616" y="2699432"/>
+                <a:ext cx="7439157" cy="648072"/>
+              </a:xfrm>
+              <a:prstGeom prst="rect">
+                <a:avLst/>
+              </a:prstGeom>
+              <a:blipFill>
+                <a:blip r:embed="rId3"/>
+                <a:stretch>
+                  <a:fillRect t="-1887" b="-1887"/>
+                </a:stretch>
+              </a:blipFill>
+              <a:ln w="0">
+                <a:noFill/>
+              </a:ln>
+            </p:spPr>
+            <p:txBody>
+              <a:bodyPr/>
+              <a:lstStyle/>
+              <a:p>
+                <a:r>
+                  <a:rPr lang="de-DE">
+                    <a:noFill/>
+                  </a:rPr>
+                  <a:t> </a:t>
+                </a:r>
+              </a:p>
+            </p:txBody>
+          </p:sp>
+        </mc:Fallback>
+      </mc:AlternateContent>
     </p:spTree>
     <p:extLst>
       <p:ext uri="{BB962C8B-B14F-4D97-AF65-F5344CB8AC3E}">
